--- a/AI Fundamentals Course/Week 3/Week3_Slides_Deep_Learning.pptx
+++ b/AI Fundamentals Course/Week 3/Week3_Slides_Deep_Learning.pptx
@@ -4692,6 +4692,10 @@
           </a:solidFill>
           <a:ln/>
         </p:spPr>
+        <p:txBody>
+          <a:bodyPr/>
+          <a:p/>
+        </p:txBody>
       </p:sp>
       <p:sp>
         <p:nvSpPr>
@@ -4956,6 +4960,10 @@
           </a:solidFill>
           <a:ln/>
         </p:spPr>
+        <p:txBody>
+          <a:bodyPr/>
+          <a:p/>
+        </p:txBody>
       </p:sp>
       <p:sp>
         <p:nvSpPr>
@@ -5202,6 +5210,10 @@
           </a:solidFill>
           <a:ln/>
         </p:spPr>
+        <p:txBody>
+          <a:bodyPr/>
+          <a:p/>
+        </p:txBody>
       </p:sp>
       <p:sp>
         <p:nvSpPr>
@@ -5473,6 +5485,10 @@
           </a:solidFill>
           <a:ln/>
         </p:spPr>
+        <p:txBody>
+          <a:bodyPr/>
+          <a:p/>
+        </p:txBody>
       </p:sp>
       <p:sp>
         <p:nvSpPr>
@@ -5737,6 +5753,10 @@
           </a:solidFill>
           <a:ln/>
         </p:spPr>
+        <p:txBody>
+          <a:bodyPr/>
+          <a:p/>
+        </p:txBody>
       </p:sp>
       <p:sp>
         <p:nvSpPr>
@@ -6001,6 +6021,10 @@
           </a:solidFill>
           <a:ln/>
         </p:spPr>
+        <p:txBody>
+          <a:bodyPr/>
+          <a:p/>
+        </p:txBody>
       </p:sp>
       <p:sp>
         <p:nvSpPr>
@@ -6436,6 +6460,10 @@
           </a:solidFill>
           <a:ln/>
         </p:spPr>
+        <p:txBody>
+          <a:bodyPr/>
+          <a:p/>
+        </p:txBody>
       </p:sp>
       <p:sp>
         <p:nvSpPr>
@@ -6700,6 +6728,10 @@
           </a:solidFill>
           <a:ln/>
         </p:spPr>
+        <p:txBody>
+          <a:bodyPr/>
+          <a:p/>
+        </p:txBody>
       </p:sp>
       <p:sp>
         <p:nvSpPr>
@@ -6982,6 +7014,10 @@
           </a:solidFill>
           <a:ln/>
         </p:spPr>
+        <p:txBody>
+          <a:bodyPr/>
+          <a:p/>
+        </p:txBody>
       </p:sp>
       <p:sp>
         <p:nvSpPr>
@@ -7314,6 +7350,10 @@
           </a:solidFill>
           <a:ln/>
         </p:spPr>
+        <p:txBody>
+          <a:bodyPr/>
+          <a:p/>
+        </p:txBody>
       </p:sp>
       <p:sp>
         <p:nvSpPr>
@@ -7578,6 +7618,10 @@
           </a:solidFill>
           <a:ln/>
         </p:spPr>
+        <p:txBody>
+          <a:bodyPr/>
+          <a:p/>
+        </p:txBody>
       </p:sp>
       <p:sp>
         <p:nvSpPr>
@@ -7885,6 +7929,10 @@
           </a:solidFill>
           <a:ln/>
         </p:spPr>
+        <p:txBody>
+          <a:bodyPr/>
+          <a:p/>
+        </p:txBody>
       </p:sp>
       <p:sp>
         <p:nvSpPr>
@@ -8149,6 +8197,10 @@
           </a:solidFill>
           <a:ln/>
         </p:spPr>
+        <p:txBody>
+          <a:bodyPr/>
+          <a:p/>
+        </p:txBody>
       </p:sp>
       <p:sp>
         <p:nvSpPr>
@@ -8438,6 +8490,10 @@
           </a:solidFill>
           <a:ln/>
         </p:spPr>
+        <p:txBody>
+          <a:bodyPr/>
+          <a:p/>
+        </p:txBody>
       </p:sp>
       <p:sp>
         <p:nvSpPr>
@@ -8745,6 +8801,10 @@
           </a:solidFill>
           <a:ln/>
         </p:spPr>
+        <p:txBody>
+          <a:bodyPr/>
+          <a:p/>
+        </p:txBody>
       </p:sp>
       <p:sp>
         <p:nvSpPr>
@@ -9009,6 +9069,10 @@
           </a:solidFill>
           <a:ln/>
         </p:spPr>
+        <p:txBody>
+          <a:bodyPr/>
+          <a:p/>
+        </p:txBody>
       </p:sp>
       <p:sp>
         <p:nvSpPr>
@@ -9269,6 +9333,10 @@
           </a:solidFill>
           <a:ln/>
         </p:spPr>
+        <p:txBody>
+          <a:bodyPr/>
+          <a:p/>
+        </p:txBody>
       </p:sp>
       <p:sp>
         <p:nvSpPr>
@@ -9558,6 +9626,10 @@
           </a:solidFill>
           <a:ln/>
         </p:spPr>
+        <p:txBody>
+          <a:bodyPr/>
+          <a:p/>
+        </p:txBody>
       </p:sp>
       <p:sp>
         <p:nvSpPr>
@@ -9840,6 +9912,10 @@
           </a:solidFill>
           <a:ln/>
         </p:spPr>
+        <p:txBody>
+          <a:bodyPr/>
+          <a:p/>
+        </p:txBody>
       </p:sp>
       <p:sp>
         <p:nvSpPr>
@@ -10239,6 +10315,10 @@
           </a:solidFill>
           <a:ln/>
         </p:spPr>
+        <p:txBody>
+          <a:bodyPr/>
+          <a:p/>
+        </p:txBody>
       </p:sp>
       <p:sp>
         <p:nvSpPr>
@@ -10503,6 +10583,10 @@
           </a:solidFill>
           <a:ln/>
         </p:spPr>
+        <p:txBody>
+          <a:bodyPr/>
+          <a:p/>
+        </p:txBody>
       </p:sp>
       <p:sp>
         <p:nvSpPr>
@@ -10810,6 +10894,10 @@
           </a:solidFill>
           <a:ln/>
         </p:spPr>
+        <p:txBody>
+          <a:bodyPr/>
+          <a:p/>
+        </p:txBody>
       </p:sp>
       <p:sp>
         <p:nvSpPr>
@@ -11099,6 +11187,10 @@
           </a:solidFill>
           <a:ln/>
         </p:spPr>
+        <p:txBody>
+          <a:bodyPr/>
+          <a:p/>
+        </p:txBody>
       </p:sp>
       <p:sp>
         <p:nvSpPr>
@@ -11363,6 +11455,10 @@
           </a:solidFill>
           <a:ln/>
         </p:spPr>
+        <p:txBody>
+          <a:bodyPr/>
+          <a:p/>
+        </p:txBody>
       </p:sp>
       <p:sp>
         <p:nvSpPr>
@@ -11663,6 +11759,10 @@
           </a:solidFill>
           <a:ln/>
         </p:spPr>
+        <p:txBody>
+          <a:bodyPr/>
+          <a:p/>
+        </p:txBody>
       </p:sp>
       <p:sp>
         <p:nvSpPr>
@@ -11927,6 +12027,10 @@
           </a:solidFill>
           <a:ln/>
         </p:spPr>
+        <p:txBody>
+          <a:bodyPr/>
+          <a:p/>
+        </p:txBody>
       </p:sp>
       <p:sp>
         <p:nvSpPr>
@@ -12198,6 +12302,10 @@
           </a:solidFill>
           <a:ln/>
         </p:spPr>
+        <p:txBody>
+          <a:bodyPr/>
+          <a:p/>
+        </p:txBody>
       </p:sp>
       <p:sp>
         <p:nvSpPr>
@@ -12487,6 +12595,10 @@
           </a:solidFill>
           <a:ln/>
         </p:spPr>
+        <p:txBody>
+          <a:bodyPr/>
+          <a:p/>
+        </p:txBody>
       </p:sp>
       <p:sp>
         <p:nvSpPr>
@@ -12794,6 +12906,10 @@
           </a:solidFill>
           <a:ln/>
         </p:spPr>
+        <p:txBody>
+          <a:bodyPr/>
+          <a:p/>
+        </p:txBody>
       </p:sp>
       <p:sp>
         <p:nvSpPr>
@@ -13137,6 +13253,10 @@
           </a:solidFill>
           <a:ln/>
         </p:spPr>
+        <p:txBody>
+          <a:bodyPr/>
+          <a:p/>
+        </p:txBody>
       </p:sp>
       <p:sp>
         <p:nvSpPr>
@@ -13426,6 +13546,10 @@
           </a:solidFill>
           <a:ln/>
         </p:spPr>
+        <p:txBody>
+          <a:bodyPr/>
+          <a:p/>
+        </p:txBody>
       </p:sp>
       <p:sp>
         <p:nvSpPr>
@@ -13672,6 +13796,10 @@
           </a:solidFill>
           <a:ln/>
         </p:spPr>
+        <p:txBody>
+          <a:bodyPr/>
+          <a:p/>
+        </p:txBody>
       </p:sp>
       <p:sp>
         <p:nvSpPr>
@@ -13979,6 +14107,10 @@
           </a:solidFill>
           <a:ln/>
         </p:spPr>
+        <p:txBody>
+          <a:bodyPr/>
+          <a:p/>
+        </p:txBody>
       </p:sp>
       <p:sp>
         <p:nvSpPr>
@@ -14304,6 +14436,10 @@
           </a:solidFill>
           <a:ln/>
         </p:spPr>
+        <p:txBody>
+          <a:bodyPr/>
+          <a:p/>
+        </p:txBody>
       </p:sp>
       <p:sp>
         <p:nvSpPr>
@@ -14611,6 +14747,10 @@
           </a:solidFill>
           <a:ln/>
         </p:spPr>
+        <p:txBody>
+          <a:bodyPr/>
+          <a:p/>
+        </p:txBody>
       </p:sp>
       <p:sp>
         <p:nvSpPr>
@@ -14875,6 +15015,10 @@
           </a:solidFill>
           <a:ln/>
         </p:spPr>
+        <p:txBody>
+          <a:bodyPr/>
+          <a:p/>
+        </p:txBody>
       </p:sp>
       <p:sp>
         <p:nvSpPr>
@@ -15103,6 +15247,10 @@
           </a:solidFill>
           <a:ln/>
         </p:spPr>
+        <p:txBody>
+          <a:bodyPr/>
+          <a:p/>
+        </p:txBody>
       </p:sp>
       <p:sp>
         <p:nvSpPr>
@@ -15385,6 +15533,10 @@
           </a:solidFill>
           <a:ln/>
         </p:spPr>
+        <p:txBody>
+          <a:bodyPr/>
+          <a:p/>
+        </p:txBody>
       </p:sp>
       <p:sp>
         <p:nvSpPr>
@@ -15649,6 +15801,10 @@
           </a:solidFill>
           <a:ln/>
         </p:spPr>
+        <p:txBody>
+          <a:bodyPr/>
+          <a:p/>
+        </p:txBody>
       </p:sp>
       <p:sp>
         <p:nvSpPr>
